--- a/Slides/Part_3_Optimization_v2.pptx
+++ b/Slides/Part_3_Optimization_v2.pptx
@@ -5,10 +5,10 @@
     <p:sldMasterId id="2147483648" r:id="rId4"/>
   </p:sldMasterIdLst>
   <p:notesMasterIdLst>
-    <p:notesMasterId r:id="rId13"/>
+    <p:notesMasterId r:id="rId14"/>
   </p:notesMasterIdLst>
   <p:handoutMasterIdLst>
-    <p:handoutMasterId r:id="rId14"/>
+    <p:handoutMasterId r:id="rId15"/>
   </p:handoutMasterIdLst>
   <p:sldIdLst>
     <p:sldId id="256" r:id="rId5"/>
@@ -16,9 +16,10 @@
     <p:sldId id="2147479319" r:id="rId7"/>
     <p:sldId id="2147479312" r:id="rId8"/>
     <p:sldId id="327" r:id="rId9"/>
-    <p:sldId id="2147479299" r:id="rId10"/>
-    <p:sldId id="799" r:id="rId11"/>
-    <p:sldId id="2147479317" r:id="rId12"/>
+    <p:sldId id="2147479320" r:id="rId10"/>
+    <p:sldId id="2147479299" r:id="rId11"/>
+    <p:sldId id="799" r:id="rId12"/>
+    <p:sldId id="2147479317" r:id="rId13"/>
   </p:sldIdLst>
   <p:sldSz cx="12192000" cy="6858000"/>
   <p:notesSz cx="6858000" cy="9144000"/>
@@ -150,12 +151,20 @@
 </p:presentation>
 </file>
 
+<file path=ppt/revisionInfo.xml><?xml version="1.0" encoding="utf-8"?>
+<p1510:revInfo xmlns:a="http://schemas.openxmlformats.org/drawingml/2006/main" xmlns:r="http://schemas.openxmlformats.org/officeDocument/2006/relationships" xmlns:p1510="http://schemas.microsoft.com/office/powerpoint/2015/10/main">
+  <p1510:revLst>
+    <p1510:client id="{246B4B66-B511-4A07-A072-7BC7D201CC1D}" v="1" dt="2026-07-11T03:28:14.423"/>
+  </p1510:revLst>
+</p1510:revInfo>
+</file>
+
 <file path=ppt/changesInfos/changesInfo1.xml><?xml version="1.0" encoding="utf-8"?>
 <pc:chgInfo xmlns:a="http://schemas.openxmlformats.org/drawingml/2006/main" xmlns:r="http://schemas.openxmlformats.org/officeDocument/2006/relationships" xmlns:ac="http://schemas.microsoft.com/office/drawing/2013/main/command" xmlns:pc="http://schemas.microsoft.com/office/powerpoint/2013/main/command">
   <pc:docChgLst>
     <pc:chgData name="Sekhar Sekharan" userId="518baa86-29dc-48c7-8fb2-d35a916cb510" providerId="ADAL" clId="{AEBB8E91-64A1-4D9B-AA4C-D40DB5207DB8}"/>
-    <pc:docChg chg="custSel modSld">
-      <pc:chgData name="Sekhar Sekharan" userId="518baa86-29dc-48c7-8fb2-d35a916cb510" providerId="ADAL" clId="{AEBB8E91-64A1-4D9B-AA4C-D40DB5207DB8}" dt="2026-07-10T13:16:30.596" v="36" actId="1076"/>
+    <pc:docChg chg="custSel addSld modSld">
+      <pc:chgData name="Sekhar Sekharan" userId="518baa86-29dc-48c7-8fb2-d35a916cb510" providerId="ADAL" clId="{AEBB8E91-64A1-4D9B-AA4C-D40DB5207DB8}" dt="2026-07-11T03:28:14.423" v="108"/>
       <pc:docMkLst>
         <pc:docMk/>
       </pc:docMkLst>
@@ -175,7 +184,7 @@
         </pc:spChg>
       </pc:sldChg>
       <pc:sldChg chg="modSp mod">
-        <pc:chgData name="Sekhar Sekharan" userId="518baa86-29dc-48c7-8fb2-d35a916cb510" providerId="ADAL" clId="{AEBB8E91-64A1-4D9B-AA4C-D40DB5207DB8}" dt="2026-07-10T13:16:30.596" v="36" actId="1076"/>
+        <pc:chgData name="Sekhar Sekharan" userId="518baa86-29dc-48c7-8fb2-d35a916cb510" providerId="ADAL" clId="{AEBB8E91-64A1-4D9B-AA4C-D40DB5207DB8}" dt="2026-07-11T03:26:24.648" v="39" actId="14100"/>
         <pc:sldMkLst>
           <pc:docMk/>
           <pc:sldMk cId="0" sldId="2147479318"/>
@@ -197,7 +206,7 @@
           </ac:spMkLst>
         </pc:spChg>
         <pc:spChg chg="mod">
-          <ac:chgData name="Sekhar Sekharan" userId="518baa86-29dc-48c7-8fb2-d35a916cb510" providerId="ADAL" clId="{AEBB8E91-64A1-4D9B-AA4C-D40DB5207DB8}" dt="2026-07-10T13:13:03.503" v="7" actId="14100"/>
+          <ac:chgData name="Sekhar Sekharan" userId="518baa86-29dc-48c7-8fb2-d35a916cb510" providerId="ADAL" clId="{AEBB8E91-64A1-4D9B-AA4C-D40DB5207DB8}" dt="2026-07-11T03:26:24.648" v="39" actId="14100"/>
           <ac:spMkLst>
             <pc:docMk/>
             <pc:sldMk cId="0" sldId="2147479318"/>
@@ -214,11 +223,19 @@
         </pc:spChg>
       </pc:sldChg>
       <pc:sldChg chg="delSp modSp mod">
-        <pc:chgData name="Sekhar Sekharan" userId="518baa86-29dc-48c7-8fb2-d35a916cb510" providerId="ADAL" clId="{AEBB8E91-64A1-4D9B-AA4C-D40DB5207DB8}" dt="2026-07-10T13:15:52.413" v="35" actId="14100"/>
+        <pc:chgData name="Sekhar Sekharan" userId="518baa86-29dc-48c7-8fb2-d35a916cb510" providerId="ADAL" clId="{AEBB8E91-64A1-4D9B-AA4C-D40DB5207DB8}" dt="2026-07-11T03:26:50.605" v="41" actId="255"/>
         <pc:sldMkLst>
           <pc:docMk/>
           <pc:sldMk cId="0" sldId="2147479319"/>
         </pc:sldMkLst>
+        <pc:spChg chg="mod">
+          <ac:chgData name="Sekhar Sekharan" userId="518baa86-29dc-48c7-8fb2-d35a916cb510" providerId="ADAL" clId="{AEBB8E91-64A1-4D9B-AA4C-D40DB5207DB8}" dt="2026-07-11T03:26:50.605" v="41" actId="255"/>
+          <ac:spMkLst>
+            <pc:docMk/>
+            <pc:sldMk cId="0" sldId="2147479319"/>
+            <ac:spMk id="2" creationId="{00000000-0000-0000-0000-000000000000}"/>
+          </ac:spMkLst>
+        </pc:spChg>
         <pc:spChg chg="mod">
           <ac:chgData name="Sekhar Sekharan" userId="518baa86-29dc-48c7-8fb2-d35a916cb510" providerId="ADAL" clId="{AEBB8E91-64A1-4D9B-AA4C-D40DB5207DB8}" dt="2026-07-10T13:15:52.413" v="35" actId="14100"/>
           <ac:spMkLst>
@@ -283,6 +300,45 @@
             <ac:picMk id="10" creationId="{00000000-0000-0000-0000-000000000000}"/>
           </ac:picMkLst>
         </pc:picChg>
+      </pc:sldChg>
+      <pc:sldChg chg="addSp delSp modSp new mod modClrScheme chgLayout">
+        <pc:chgData name="Sekhar Sekharan" userId="518baa86-29dc-48c7-8fb2-d35a916cb510" providerId="ADAL" clId="{AEBB8E91-64A1-4D9B-AA4C-D40DB5207DB8}" dt="2026-07-11T03:28:14.423" v="108"/>
+        <pc:sldMkLst>
+          <pc:docMk/>
+          <pc:sldMk cId="1601121871" sldId="2147479320"/>
+        </pc:sldMkLst>
+        <pc:spChg chg="del mod ord">
+          <ac:chgData name="Sekhar Sekharan" userId="518baa86-29dc-48c7-8fb2-d35a916cb510" providerId="ADAL" clId="{AEBB8E91-64A1-4D9B-AA4C-D40DB5207DB8}" dt="2026-07-11T03:27:24.863" v="43" actId="700"/>
+          <ac:spMkLst>
+            <pc:docMk/>
+            <pc:sldMk cId="1601121871" sldId="2147479320"/>
+            <ac:spMk id="2" creationId="{00EC0479-7087-1BC9-61D4-5ED0453FA3D9}"/>
+          </ac:spMkLst>
+        </pc:spChg>
+        <pc:spChg chg="del">
+          <ac:chgData name="Sekhar Sekharan" userId="518baa86-29dc-48c7-8fb2-d35a916cb510" providerId="ADAL" clId="{AEBB8E91-64A1-4D9B-AA4C-D40DB5207DB8}" dt="2026-07-11T03:27:24.863" v="43" actId="700"/>
+          <ac:spMkLst>
+            <pc:docMk/>
+            <pc:sldMk cId="1601121871" sldId="2147479320"/>
+            <ac:spMk id="3" creationId="{F1A36B81-82A0-FE61-7269-9004209E8A78}"/>
+          </ac:spMkLst>
+        </pc:spChg>
+        <pc:spChg chg="del">
+          <ac:chgData name="Sekhar Sekharan" userId="518baa86-29dc-48c7-8fb2-d35a916cb510" providerId="ADAL" clId="{AEBB8E91-64A1-4D9B-AA4C-D40DB5207DB8}" dt="2026-07-11T03:27:24.863" v="43" actId="700"/>
+          <ac:spMkLst>
+            <pc:docMk/>
+            <pc:sldMk cId="1601121871" sldId="2147479320"/>
+            <ac:spMk id="4" creationId="{B66A4070-B258-FEAF-4068-B36B28D1769D}"/>
+          </ac:spMkLst>
+        </pc:spChg>
+        <pc:spChg chg="add mod ord">
+          <ac:chgData name="Sekhar Sekharan" userId="518baa86-29dc-48c7-8fb2-d35a916cb510" providerId="ADAL" clId="{AEBB8E91-64A1-4D9B-AA4C-D40DB5207DB8}" dt="2026-07-11T03:28:14.423" v="108"/>
+          <ac:spMkLst>
+            <pc:docMk/>
+            <pc:sldMk cId="1601121871" sldId="2147479320"/>
+            <ac:spMk id="5" creationId="{633BF3F1-772B-A92E-615C-FB7261D595D5}"/>
+          </ac:spMkLst>
+        </pc:spChg>
       </pc:sldChg>
     </pc:docChg>
   </pc:docChgLst>
@@ -1491,7 +1547,7 @@
             <a:fld id="{AD73B8C3-A209-4A55-9261-22C2A02B3159}" type="slidenum">
               <a:rPr lang="en-US" smtClean="0"/>
               <a:pPr/>
-              <a:t>6</a:t>
+              <a:t>7</a:t>
             </a:fld>
             <a:endParaRPr lang="en-US"/>
           </a:p>
@@ -1709,7 +1765,7 @@
             <a:fld id="{AD73B8C3-A209-4A55-9261-22C2A02B3159}" type="slidenum">
               <a:rPr lang="en-US" smtClean="0"/>
               <a:pPr/>
-              <a:t>7</a:t>
+              <a:t>8</a:t>
             </a:fld>
             <a:endParaRPr lang="en-US"/>
           </a:p>
@@ -1818,7 +1874,7 @@
             <a:fld id="{AD73B8C3-A209-4A55-9261-22C2A02B3159}" type="slidenum">
               <a:rPr lang="en-US" smtClean="0"/>
               <a:pPr/>
-              <a:t>8</a:t>
+              <a:t>9</a:t>
             </a:fld>
             <a:endParaRPr lang="en-US"/>
           </a:p>
@@ -4706,7 +4762,7 @@
         <p:spPr>
           <a:xfrm>
             <a:off x="490948" y="2496719"/>
-            <a:ext cx="5208814" cy="1957459"/>
+            <a:ext cx="5387232" cy="1960981"/>
           </a:xfrm>
           <a:prstGeom prst="rect">
             <a:avLst/>
@@ -4719,10 +4775,12 @@
           </a:bodyPr>
           <a:lstStyle/>
           <a:p>
-            <a:pPr marL="220000" indent="-120000">
+            <a:pPr marL="385750" indent="-285750">
               <a:spcAft>
                 <a:spcPts val="600"/>
               </a:spcAft>
+              <a:buFont typeface="Arial" panose="020B0604020202020204" pitchFamily="34" charset="0"/>
+              <a:buChar char="•"/>
               <a:defRPr sz="1350">
                 <a:solidFill>
                   <a:srgbClr val="282828"/>
@@ -4736,10 +4794,12 @@
             </a:r>
           </a:p>
           <a:p>
-            <a:pPr marL="220000" indent="-120000">
+            <a:pPr marL="385750" indent="-285750">
               <a:spcAft>
                 <a:spcPts val="600"/>
               </a:spcAft>
+              <a:buFont typeface="Arial" panose="020B0604020202020204" pitchFamily="34" charset="0"/>
+              <a:buChar char="•"/>
               <a:defRPr sz="1350">
                 <a:solidFill>
                   <a:srgbClr val="282828"/>
@@ -4753,10 +4813,12 @@
             </a:r>
           </a:p>
           <a:p>
-            <a:pPr marL="220000" indent="-120000">
+            <a:pPr marL="385750" indent="-285750">
               <a:spcAft>
                 <a:spcPts val="600"/>
               </a:spcAft>
+              <a:buFont typeface="Arial" panose="020B0604020202020204" pitchFamily="34" charset="0"/>
+              <a:buChar char="•"/>
               <a:defRPr sz="1350">
                 <a:solidFill>
                   <a:srgbClr val="282828"/>
@@ -4770,10 +4832,12 @@
             </a:r>
           </a:p>
           <a:p>
-            <a:pPr marL="220000" indent="-120000">
+            <a:pPr marL="385750" indent="-285750">
               <a:spcAft>
                 <a:spcPts val="600"/>
               </a:spcAft>
+              <a:buFont typeface="Arial" panose="020B0604020202020204" pitchFamily="34" charset="0"/>
+              <a:buChar char="•"/>
               <a:defRPr sz="1350">
                 <a:solidFill>
                   <a:srgbClr val="282828"/>
@@ -5073,8 +5137,8 @@
         </p:nvSpPr>
         <p:spPr>
           <a:xfrm>
-            <a:off x="594360" y="384048"/>
-            <a:ext cx="10515600" cy="411480"/>
+            <a:off x="483652" y="306591"/>
+            <a:ext cx="4743606" cy="523220"/>
           </a:xfrm>
           <a:prstGeom prst="rect">
             <a:avLst/>
@@ -5088,7 +5152,7 @@
           <a:lstStyle/>
           <a:p>
             <a:r>
-              <a:rPr sz="1800">
+              <a:rPr sz="2800" dirty="0">
                 <a:solidFill>
                   <a:srgbClr val="0072BD"/>
                 </a:solidFill>
@@ -8739,6 +8803,64 @@
   <p:cSld>
     <p:spTree>
       <p:nvGrpSpPr>
+        <p:cNvPr id="1" name=""/>
+        <p:cNvGrpSpPr/>
+        <p:nvPr/>
+      </p:nvGrpSpPr>
+      <p:grpSpPr>
+        <a:xfrm>
+          <a:off x="0" y="0"/>
+          <a:ext cx="0" cy="0"/>
+          <a:chOff x="0" y="0"/>
+          <a:chExt cx="0" cy="0"/>
+        </a:xfrm>
+      </p:grpSpPr>
+      <p:sp>
+        <p:nvSpPr>
+          <p:cNvPr id="5" name="Title 4">
+            <a:extLst>
+              <a:ext uri="{FF2B5EF4-FFF2-40B4-BE49-F238E27FC236}">
+                <a16:creationId xmlns:a16="http://schemas.microsoft.com/office/drawing/2014/main" id="{633BF3F1-772B-A92E-615C-FB7261D595D5}"/>
+              </a:ext>
+            </a:extLst>
+          </p:cNvPr>
+          <p:cNvSpPr>
+            <a:spLocks noGrp="1"/>
+          </p:cNvSpPr>
+          <p:nvPr>
+            <p:ph type="title"/>
+          </p:nvPr>
+        </p:nvSpPr>
+        <p:spPr/>
+        <p:txBody>
+          <a:bodyPr/>
+          <a:lstStyle/>
+          <a:p>
+            <a:r>
+              <a:rPr lang="en-US" dirty="0"/>
+              <a:t>Optimization Exercise </a:t>
+            </a:r>
+          </a:p>
+        </p:txBody>
+      </p:sp>
+    </p:spTree>
+    <p:extLst>
+      <p:ext uri="{BB962C8B-B14F-4D97-AF65-F5344CB8AC3E}">
+        <p14:creationId xmlns:p14="http://schemas.microsoft.com/office/powerpoint/2010/main" val="1601121871"/>
+      </p:ext>
+    </p:extLst>
+  </p:cSld>
+  <p:clrMapOvr>
+    <a:masterClrMapping/>
+  </p:clrMapOvr>
+</p:sld>
+</file>
+
+<file path=ppt/slides/slide7.xml><?xml version="1.0" encoding="utf-8"?>
+<p:sld xmlns:a="http://schemas.openxmlformats.org/drawingml/2006/main" xmlns:r="http://schemas.openxmlformats.org/officeDocument/2006/relationships" xmlns:p="http://schemas.openxmlformats.org/presentationml/2006/main">
+  <p:cSld>
+    <p:spTree>
+      <p:nvGrpSpPr>
         <p:cNvPr id="1" name="">
           <a:extLst>
             <a:ext uri="{FF2B5EF4-FFF2-40B4-BE49-F238E27FC236}">
@@ -9679,7 +9801,7 @@
 </p:sld>
 </file>
 
-<file path=ppt/slides/slide7.xml><?xml version="1.0" encoding="utf-8"?>
+<file path=ppt/slides/slide8.xml><?xml version="1.0" encoding="utf-8"?>
 <p:sld xmlns:a="http://schemas.openxmlformats.org/drawingml/2006/main" xmlns:r="http://schemas.openxmlformats.org/officeDocument/2006/relationships" xmlns:p="http://schemas.openxmlformats.org/presentationml/2006/main">
   <p:cSld>
     <p:spTree>
@@ -13616,7 +13738,7 @@
 </p:sld>
 </file>
 
-<file path=ppt/slides/slide8.xml><?xml version="1.0" encoding="utf-8"?>
+<file path=ppt/slides/slide9.xml><?xml version="1.0" encoding="utf-8"?>
 <p:sld xmlns:a="http://schemas.openxmlformats.org/drawingml/2006/main" xmlns:r="http://schemas.openxmlformats.org/officeDocument/2006/relationships" xmlns:p="http://schemas.openxmlformats.org/presentationml/2006/main">
   <p:cSld>
     <p:spTree>
@@ -14826,21 +14948,6 @@
 </file>
 
 <file path=customXml/item1.xml><?xml version="1.0" encoding="utf-8"?>
-<?mso-contentType ?>
-<FormTemplates xmlns="http://schemas.microsoft.com/sharepoint/v3/contenttype/forms">
-  <Display>DocumentLibraryForm</Display>
-  <Edit>DocumentLibraryForm</Edit>
-  <New>DocumentLibraryForm</New>
-</FormTemplates>
-</file>
-
-<file path=customXml/item2.xml><?xml version="1.0" encoding="utf-8"?>
-<p:properties xmlns:p="http://schemas.microsoft.com/office/2006/metadata/properties" xmlns:xsi="http://www.w3.org/2001/XMLSchema-instance" xmlns:pc="http://schemas.microsoft.com/office/infopath/2007/PartnerControls">
-  <documentManagement/>
-</p:properties>
-</file>
-
-<file path=customXml/item3.xml><?xml version="1.0" encoding="utf-8"?>
 <ct:contentTypeSchema xmlns:ct="http://schemas.microsoft.com/office/2006/metadata/contentType" xmlns:ma="http://schemas.microsoft.com/office/2006/metadata/properties/metaAttributes" ct:_="" ma:_="" ma:contentTypeName="Document" ma:contentTypeID="0x010100E8BDF109259C3742B70118398EA662DF" ma:contentTypeVersion="4" ma:contentTypeDescription="Create a new document." ma:contentTypeScope="" ma:versionID="685566423c5dd230aba5d55ba4d04239">
   <xsd:schema xmlns:xsd="http://www.w3.org/2001/XMLSchema" xmlns:xs="http://www.w3.org/2001/XMLSchema" xmlns:p="http://schemas.microsoft.com/office/2006/metadata/properties" xmlns:ns2="c0427815-c159-405c-a9c3-9204bd95a48e" targetNamespace="http://schemas.microsoft.com/office/2006/metadata/properties" ma:root="true" ma:fieldsID="db0a9b8f4106c642c10fea28b3543bf4" ns2:_="">
     <xsd:import namespace="c0427815-c159-405c-a9c3-9204bd95a48e"/>
@@ -14984,10 +15091,35 @@
 </ct:contentTypeSchema>
 </file>
 
+<file path=customXml/item2.xml><?xml version="1.0" encoding="utf-8"?>
+<p:properties xmlns:p="http://schemas.microsoft.com/office/2006/metadata/properties" xmlns:xsi="http://www.w3.org/2001/XMLSchema-instance" xmlns:pc="http://schemas.microsoft.com/office/infopath/2007/PartnerControls">
+  <documentManagement/>
+</p:properties>
+</file>
+
+<file path=customXml/item3.xml><?xml version="1.0" encoding="utf-8"?>
+<?mso-contentType ?>
+<FormTemplates xmlns="http://schemas.microsoft.com/sharepoint/v3/contenttype/forms">
+  <Display>DocumentLibraryForm</Display>
+  <Edit>DocumentLibraryForm</Edit>
+  <New>DocumentLibraryForm</New>
+</FormTemplates>
+</file>
+
 <file path=customXml/itemProps1.xml><?xml version="1.0" encoding="utf-8"?>
-<ds:datastoreItem xmlns:ds="http://schemas.openxmlformats.org/officeDocument/2006/customXml" ds:itemID="{3B61DF2E-245C-45DF-A9A5-EABECEA4295F}">
+<ds:datastoreItem xmlns:ds="http://schemas.openxmlformats.org/officeDocument/2006/customXml" ds:itemID="{A130D810-BCBB-473F-88F7-D071E062A697}">
   <ds:schemaRefs>
-    <ds:schemaRef ds:uri="http://schemas.microsoft.com/sharepoint/v3/contenttype/forms"/>
+    <ds:schemaRef ds:uri="http://schemas.microsoft.com/office/2006/metadata/contentType"/>
+    <ds:schemaRef ds:uri="http://schemas.microsoft.com/office/2006/metadata/properties/metaAttributes"/>
+    <ds:schemaRef ds:uri="http://www.w3.org/2001/XMLSchema"/>
+    <ds:schemaRef ds:uri="http://schemas.microsoft.com/office/2006/metadata/properties"/>
+    <ds:schemaRef ds:uri="c0427815-c159-405c-a9c3-9204bd95a48e"/>
+    <ds:schemaRef ds:uri="http://schemas.microsoft.com/office/2006/documentManagement/types"/>
+    <ds:schemaRef ds:uri="http://schemas.microsoft.com/office/infopath/2007/PartnerControls"/>
+    <ds:schemaRef ds:uri="http://schemas.openxmlformats.org/package/2006/metadata/core-properties"/>
+    <ds:schemaRef ds:uri="http://purl.org/dc/elements/1.1/"/>
+    <ds:schemaRef ds:uri="http://purl.org/dc/terms/"/>
+    <ds:schemaRef ds:uri="http://schemas.microsoft.com/internal/obd"/>
   </ds:schemaRefs>
 </ds:datastoreItem>
 </file>
@@ -15011,19 +15143,9 @@
 </file>
 
 <file path=customXml/itemProps3.xml><?xml version="1.0" encoding="utf-8"?>
-<ds:datastoreItem xmlns:ds="http://schemas.openxmlformats.org/officeDocument/2006/customXml" ds:itemID="{A130D810-BCBB-473F-88F7-D071E062A697}">
+<ds:datastoreItem xmlns:ds="http://schemas.openxmlformats.org/officeDocument/2006/customXml" ds:itemID="{3B61DF2E-245C-45DF-A9A5-EABECEA4295F}">
   <ds:schemaRefs>
-    <ds:schemaRef ds:uri="http://schemas.microsoft.com/office/2006/metadata/contentType"/>
-    <ds:schemaRef ds:uri="http://schemas.microsoft.com/office/2006/metadata/properties/metaAttributes"/>
-    <ds:schemaRef ds:uri="http://www.w3.org/2001/XMLSchema"/>
-    <ds:schemaRef ds:uri="http://schemas.microsoft.com/office/2006/metadata/properties"/>
-    <ds:schemaRef ds:uri="c0427815-c159-405c-a9c3-9204bd95a48e"/>
-    <ds:schemaRef ds:uri="http://schemas.microsoft.com/office/2006/documentManagement/types"/>
-    <ds:schemaRef ds:uri="http://schemas.microsoft.com/office/infopath/2007/PartnerControls"/>
-    <ds:schemaRef ds:uri="http://schemas.openxmlformats.org/package/2006/metadata/core-properties"/>
-    <ds:schemaRef ds:uri="http://purl.org/dc/elements/1.1/"/>
-    <ds:schemaRef ds:uri="http://purl.org/dc/terms/"/>
-    <ds:schemaRef ds:uri="http://schemas.microsoft.com/internal/obd"/>
+    <ds:schemaRef ds:uri="http://schemas.microsoft.com/sharepoint/v3/contenttype/forms"/>
   </ds:schemaRefs>
 </ds:datastoreItem>
 </file>
